--- a/판매용_템플릿/_판매팩/뷰티샵_프리미엄/06_메뉴구조.pptx
+++ b/판매용_템플릿/_판매팩/뷰티샵_프리미엄/06_메뉴구조.pptx
@@ -948,7 +948,7 @@
             </a:avLst>
           </a:prstGeom>
           <a:solidFill>
-            <a:srgbClr val="E4762C"/>
+            <a:srgbClr val="BC5918"/>
           </a:solidFill>
           <a:ln/>
         </p:spPr>
@@ -1190,7 +1190,7 @@
             </a:avLst>
           </a:prstGeom>
           <a:solidFill>
-            <a:srgbClr val="E4762C"/>
+            <a:srgbClr val="BC5918"/>
           </a:solidFill>
           <a:ln/>
         </p:spPr>
@@ -1768,7 +1768,7 @@
             </a:avLst>
           </a:prstGeom>
           <a:solidFill>
-            <a:srgbClr val="E4762C"/>
+            <a:srgbClr val="BC5918"/>
           </a:solidFill>
           <a:ln/>
         </p:spPr>
@@ -2514,7 +2514,7 @@
             </a:avLst>
           </a:prstGeom>
           <a:solidFill>
-            <a:srgbClr val="E4762C"/>
+            <a:srgbClr val="BC5918"/>
           </a:solidFill>
           <a:ln/>
         </p:spPr>
@@ -3092,7 +3092,7 @@
             </a:avLst>
           </a:prstGeom>
           <a:solidFill>
-            <a:srgbClr val="E4762C"/>
+            <a:srgbClr val="BC5918"/>
           </a:solidFill>
           <a:ln/>
         </p:spPr>
@@ -3502,7 +3502,7 @@
             </a:avLst>
           </a:prstGeom>
           <a:solidFill>
-            <a:srgbClr val="E4762C"/>
+            <a:srgbClr val="BC5918"/>
           </a:solidFill>
           <a:ln/>
         </p:spPr>
@@ -4080,7 +4080,7 @@
             </a:avLst>
           </a:prstGeom>
           <a:solidFill>
-            <a:srgbClr val="E4762C"/>
+            <a:srgbClr val="BC5918"/>
           </a:solidFill>
           <a:ln/>
         </p:spPr>
@@ -4574,7 +4574,7 @@
             </a:avLst>
           </a:prstGeom>
           <a:solidFill>
-            <a:srgbClr val="E4762C"/>
+            <a:srgbClr val="BC5918"/>
           </a:solidFill>
           <a:ln/>
         </p:spPr>
@@ -4816,7 +4816,7 @@
             </a:avLst>
           </a:prstGeom>
           <a:solidFill>
-            <a:srgbClr val="E4762C"/>
+            <a:srgbClr val="BC5918"/>
           </a:solidFill>
           <a:ln/>
         </p:spPr>
@@ -5142,7 +5142,7 @@
             </a:avLst>
           </a:prstGeom>
           <a:solidFill>
-            <a:srgbClr val="E4762C"/>
+            <a:srgbClr val="BC5918"/>
           </a:solidFill>
           <a:ln/>
         </p:spPr>
@@ -5384,7 +5384,7 @@
             </a:avLst>
           </a:prstGeom>
           <a:solidFill>
-            <a:srgbClr val="E4762C"/>
+            <a:srgbClr val="BC5918"/>
           </a:solidFill>
           <a:ln/>
         </p:spPr>
